--- a/Slides/Week03/04：解碼器模型.pptx
+++ b/Slides/Week03/04：解碼器模型.pptx
@@ -203,7 +203,7 @@
           <a:p>
             <a:fld id="{DF2768FB-F680-46BA-8721-EBD5055783A4}" type="datetimeFigureOut">
               <a:rPr lang="zh-TW" altLang="en-US" smtClean="0"/>
-              <a:t>2024/3/29</a:t>
+              <a:t>2024/12/4</a:t>
             </a:fld>
             <a:endParaRPr lang="zh-TW" altLang="en-US"/>
           </a:p>
@@ -1044,7 +1044,7 @@
           <a:p>
             <a:fld id="{0495B665-C8E0-4414-8FEF-82ED686654F1}" type="datetimeFigureOut">
               <a:rPr lang="zh-TW" altLang="en-US" smtClean="0"/>
-              <a:t>2024/3/29</a:t>
+              <a:t>2024/12/4</a:t>
             </a:fld>
             <a:endParaRPr lang="zh-TW" altLang="en-US"/>
           </a:p>
@@ -1242,7 +1242,7 @@
           <a:p>
             <a:fld id="{0495B665-C8E0-4414-8FEF-82ED686654F1}" type="datetimeFigureOut">
               <a:rPr lang="zh-TW" altLang="en-US" smtClean="0"/>
-              <a:t>2024/3/29</a:t>
+              <a:t>2024/12/4</a:t>
             </a:fld>
             <a:endParaRPr lang="zh-TW" altLang="en-US"/>
           </a:p>
@@ -1450,7 +1450,7 @@
           <a:p>
             <a:fld id="{0495B665-C8E0-4414-8FEF-82ED686654F1}" type="datetimeFigureOut">
               <a:rPr lang="zh-TW" altLang="en-US" smtClean="0"/>
-              <a:t>2024/3/29</a:t>
+              <a:t>2024/12/4</a:t>
             </a:fld>
             <a:endParaRPr lang="zh-TW" altLang="en-US"/>
           </a:p>
@@ -1831,7 +1831,7 @@
                 </a:solidFill>
               </a:rPr>
               <a:pPr/>
-              <a:t>3/29/2024</a:t>
+              <a:t>12/4/2024</a:t>
             </a:fld>
             <a:endParaRPr kumimoji="0" lang="en-US" dirty="0"/>
           </a:p>
@@ -2062,7 +2062,7 @@
                 </a:solidFill>
               </a:rPr>
               <a:pPr/>
-              <a:t>3/29/2024</a:t>
+              <a:t>12/4/2024</a:t>
             </a:fld>
             <a:endParaRPr kumimoji="0" lang="en-US" dirty="0"/>
           </a:p>
@@ -2295,7 +2295,7 @@
                 </a:solidFill>
               </a:rPr>
               <a:pPr/>
-              <a:t>3/29/2024</a:t>
+              <a:t>12/4/2024</a:t>
             </a:fld>
             <a:endParaRPr kumimoji="0" lang="en-US" dirty="0"/>
           </a:p>
@@ -2777,7 +2777,7 @@
                 </a:solidFill>
               </a:rPr>
               <a:pPr/>
-              <a:t>3/29/2024</a:t>
+              <a:t>12/4/2024</a:t>
             </a:fld>
             <a:endParaRPr kumimoji="0" lang="en-US" dirty="0"/>
           </a:p>
@@ -3134,7 +3134,7 @@
                 </a:solidFill>
               </a:rPr>
               <a:pPr/>
-              <a:t>3/29/2024</a:t>
+              <a:t>12/4/2024</a:t>
             </a:fld>
             <a:endParaRPr kumimoji="0" lang="en-US" dirty="0"/>
           </a:p>
@@ -3497,7 +3497,7 @@
                 </a:solidFill>
               </a:rPr>
               <a:pPr/>
-              <a:t>3/29/2024</a:t>
+              <a:t>12/4/2024</a:t>
             </a:fld>
             <a:endParaRPr kumimoji="0" lang="en-US" dirty="0"/>
           </a:p>
@@ -3807,7 +3807,7 @@
                 </a:solidFill>
               </a:rPr>
               <a:pPr/>
-              <a:t>3/29/2024</a:t>
+              <a:t>12/4/2024</a:t>
             </a:fld>
             <a:endParaRPr kumimoji="0" lang="en-US" dirty="0"/>
           </a:p>
@@ -4002,7 +4002,7 @@
           <a:p>
             <a:fld id="{0495B665-C8E0-4414-8FEF-82ED686654F1}" type="datetimeFigureOut">
               <a:rPr lang="zh-TW" altLang="en-US" smtClean="0"/>
-              <a:t>2024/3/29</a:t>
+              <a:t>2024/12/4</a:t>
             </a:fld>
             <a:endParaRPr lang="zh-TW" altLang="en-US"/>
           </a:p>
@@ -4486,7 +4486,7 @@
                 </a:solidFill>
               </a:rPr>
               <a:pPr/>
-              <a:t>3/29/2024</a:t>
+              <a:t>12/4/2024</a:t>
             </a:fld>
             <a:endParaRPr kumimoji="0" lang="en-US" dirty="0"/>
           </a:p>
@@ -4882,7 +4882,7 @@
                 </a:solidFill>
               </a:rPr>
               <a:pPr/>
-              <a:t>3/29/2024</a:t>
+              <a:t>12/4/2024</a:t>
             </a:fld>
             <a:endParaRPr kumimoji="0" lang="en-US" dirty="0"/>
           </a:p>
@@ -5222,7 +5222,7 @@
                 </a:solidFill>
               </a:rPr>
               <a:pPr/>
-              <a:t>3/29/2024</a:t>
+              <a:t>12/4/2024</a:t>
             </a:fld>
             <a:endParaRPr kumimoji="0" lang="en-US" dirty="0"/>
           </a:p>
@@ -5803,7 +5803,7 @@
                 </a:solidFill>
               </a:rPr>
               <a:pPr/>
-              <a:t>3/29/2024</a:t>
+              <a:t>12/4/2024</a:t>
             </a:fld>
             <a:endParaRPr kumimoji="0" lang="en-US" dirty="0"/>
           </a:p>
@@ -6372,7 +6372,7 @@
                 </a:solidFill>
               </a:rPr>
               <a:pPr/>
-              <a:t>3/29/2024</a:t>
+              <a:t>12/4/2024</a:t>
             </a:fld>
             <a:endParaRPr kumimoji="0" lang="en-US" dirty="0"/>
           </a:p>
@@ -6836,7 +6836,7 @@
                 </a:solidFill>
               </a:rPr>
               <a:pPr/>
-              <a:t>3/29/2024</a:t>
+              <a:t>12/4/2024</a:t>
             </a:fld>
             <a:endParaRPr kumimoji="0" lang="en-US" dirty="0"/>
           </a:p>
@@ -7265,7 +7265,7 @@
                 </a:solidFill>
               </a:rPr>
               <a:pPr/>
-              <a:t>3/29/2024</a:t>
+              <a:t>12/4/2024</a:t>
             </a:fld>
             <a:endParaRPr kumimoji="0" lang="en-US" dirty="0"/>
           </a:p>
@@ -7774,7 +7774,7 @@
                 </a:solidFill>
               </a:rPr>
               <a:pPr/>
-              <a:t>3/29/2024</a:t>
+              <a:t>12/4/2024</a:t>
             </a:fld>
             <a:endParaRPr kumimoji="0" lang="en-US" dirty="0"/>
           </a:p>
@@ -8283,7 +8283,7 @@
                 </a:solidFill>
               </a:rPr>
               <a:pPr/>
-              <a:t>3/29/2024</a:t>
+              <a:t>12/4/2024</a:t>
             </a:fld>
             <a:endParaRPr kumimoji="0" lang="en-US" dirty="0"/>
           </a:p>
@@ -8504,7 +8504,7 @@
                 </a:solidFill>
               </a:rPr>
               <a:pPr/>
-              <a:t>3/29/2024</a:t>
+              <a:t>12/4/2024</a:t>
             </a:fld>
             <a:endParaRPr kumimoji="0" lang="en-US" dirty="0"/>
           </a:p>
@@ -8776,7 +8776,7 @@
           <a:p>
             <a:fld id="{0495B665-C8E0-4414-8FEF-82ED686654F1}" type="datetimeFigureOut">
               <a:rPr lang="zh-TW" altLang="en-US" smtClean="0"/>
-              <a:t>2024/3/29</a:t>
+              <a:t>2024/12/4</a:t>
             </a:fld>
             <a:endParaRPr lang="zh-TW" altLang="en-US"/>
           </a:p>
@@ -9112,7 +9112,7 @@
                 </a:solidFill>
               </a:rPr>
               <a:pPr/>
-              <a:t>3/29/2024</a:t>
+              <a:t>12/4/2024</a:t>
             </a:fld>
             <a:endParaRPr kumimoji="0" lang="en-US" dirty="0"/>
           </a:p>
@@ -9336,7 +9336,7 @@
                 </a:solidFill>
               </a:rPr>
               <a:pPr/>
-              <a:t>3/29/2024</a:t>
+              <a:t>12/4/2024</a:t>
             </a:fld>
             <a:endParaRPr kumimoji="0" lang="en-US" dirty="0"/>
           </a:p>
@@ -9517,7 +9517,7 @@
             <a:fld id="{ACB2EC6F-6501-4E04-BD6C-A8A6CABB2C5B}" type="datetimeFigureOut">
               <a:rPr kumimoji="0" lang="en-US" smtClean="0"/>
               <a:pPr/>
-              <a:t>3/29/2024</a:t>
+              <a:t>12/4/2024</a:t>
             </a:fld>
             <a:endParaRPr kumimoji="0" lang="en-US" dirty="0"/>
           </a:p>
@@ -9801,7 +9801,7 @@
           <a:p>
             <a:fld id="{0495B665-C8E0-4414-8FEF-82ED686654F1}" type="datetimeFigureOut">
               <a:rPr lang="zh-TW" altLang="en-US" smtClean="0"/>
-              <a:t>2024/3/29</a:t>
+              <a:t>2024/12/4</a:t>
             </a:fld>
             <a:endParaRPr lang="zh-TW" altLang="en-US"/>
           </a:p>
@@ -10213,7 +10213,7 @@
           <a:p>
             <a:fld id="{0495B665-C8E0-4414-8FEF-82ED686654F1}" type="datetimeFigureOut">
               <a:rPr lang="zh-TW" altLang="en-US" smtClean="0"/>
-              <a:t>2024/3/29</a:t>
+              <a:t>2024/12/4</a:t>
             </a:fld>
             <a:endParaRPr lang="zh-TW" altLang="en-US"/>
           </a:p>
@@ -10354,7 +10354,7 @@
           <a:p>
             <a:fld id="{0495B665-C8E0-4414-8FEF-82ED686654F1}" type="datetimeFigureOut">
               <a:rPr lang="zh-TW" altLang="en-US" smtClean="0"/>
-              <a:t>2024/3/29</a:t>
+              <a:t>2024/12/4</a:t>
             </a:fld>
             <a:endParaRPr lang="zh-TW" altLang="en-US"/>
           </a:p>
@@ -10467,7 +10467,7 @@
           <a:p>
             <a:fld id="{0495B665-C8E0-4414-8FEF-82ED686654F1}" type="datetimeFigureOut">
               <a:rPr lang="zh-TW" altLang="en-US" smtClean="0"/>
-              <a:t>2024/3/29</a:t>
+              <a:t>2024/12/4</a:t>
             </a:fld>
             <a:endParaRPr lang="zh-TW" altLang="en-US"/>
           </a:p>
@@ -10778,7 +10778,7 @@
           <a:p>
             <a:fld id="{0495B665-C8E0-4414-8FEF-82ED686654F1}" type="datetimeFigureOut">
               <a:rPr lang="zh-TW" altLang="en-US" smtClean="0"/>
-              <a:t>2024/3/29</a:t>
+              <a:t>2024/12/4</a:t>
             </a:fld>
             <a:endParaRPr lang="zh-TW" altLang="en-US"/>
           </a:p>
@@ -11066,7 +11066,7 @@
           <a:p>
             <a:fld id="{0495B665-C8E0-4414-8FEF-82ED686654F1}" type="datetimeFigureOut">
               <a:rPr lang="zh-TW" altLang="en-US" smtClean="0"/>
-              <a:t>2024/3/29</a:t>
+              <a:t>2024/12/4</a:t>
             </a:fld>
             <a:endParaRPr lang="zh-TW" altLang="en-US"/>
           </a:p>
@@ -11307,7 +11307,7 @@
           <a:p>
             <a:fld id="{0495B665-C8E0-4414-8FEF-82ED686654F1}" type="datetimeFigureOut">
               <a:rPr lang="zh-TW" altLang="en-US" smtClean="0"/>
-              <a:t>2024/3/29</a:t>
+              <a:t>2024/12/4</a:t>
             </a:fld>
             <a:endParaRPr lang="zh-TW" altLang="en-US"/>
           </a:p>
@@ -11879,7 +11879,7 @@
                 </a:solidFill>
               </a:rPr>
               <a:pPr/>
-              <a:t>3/29/2024</a:t>
+              <a:t>12/4/2024</a:t>
             </a:fld>
             <a:endParaRPr kumimoji="0" lang="en-US" sz="1200" dirty="0">
               <a:solidFill>
